--- a/9_documentation/course/TIP4PATLIBS_IPScore_NotebookLogic_Explained_con_note.pptx
+++ b/9_documentation/course/TIP4PATLIBS_IPScore_NotebookLogic_Explained_con_note.pptx
@@ -4,9 +4,6 @@
   <p:sldMasterIdLst>
     <p:sldMasterId id="2147483648" r:id="rId1"/>
   </p:sldMasterIdLst>
-  <p:notesMasterIdLst>
-    <p:notesMasterId r:id="rId13"/>
-  </p:notesMasterIdLst>
   <p:sldIdLst>
     <p:sldId id="256" r:id="rId2"/>
     <p:sldId id="257" r:id="rId3"/>
@@ -137,7 +134,7 @@
 </file>
 
 <file path=ppt/notesMasters/notesMaster1.xml><?xml version="1.0" encoding="utf-8"?>
-<p:notesMaster xmlns:a="http://schemas.openxmlformats.org/drawingml/2006/main" xmlns:r="http://schemas.openxmlformats.org/officeDocument/2006/relationships" xmlns:p="http://schemas.openxmlformats.org/presentationml/2006/main">
+<p:notesMaster xmlns:a="http://schemas.openxmlformats.org/drawingml/2006/main" xmlns:p="http://schemas.openxmlformats.org/presentationml/2006/main" xmlns:r="http://schemas.openxmlformats.org/officeDocument/2006/relationships">
   <p:cSld>
     <p:bg>
       <p:bgRef idx="1001">
@@ -158,16 +155,241 @@
           <a:chExt cx="0" cy="0"/>
         </a:xfrm>
       </p:grpSpPr>
+      <p:sp>
+        <p:nvSpPr>
+          <p:cNvPr id="2" name="Header Placeholder 1"/>
+          <p:cNvSpPr>
+            <a:spLocks noGrp="1"/>
+          </p:cNvSpPr>
+          <p:nvPr>
+            <p:ph type="hdr" sz="quarter"/>
+          </p:nvPr>
+        </p:nvSpPr>
+        <p:spPr>
+          <a:xfrm>
+            <a:off x="0" y="0"/>
+            <a:ext cx="2971800" cy="457200"/>
+          </a:xfrm>
+          <a:prstGeom prst="rect">
+            <a:avLst/>
+          </a:prstGeom>
+        </p:spPr>
+        <p:txBody>
+          <a:bodyPr vert="horz" lIns="91440" tIns="45720" rIns="91440" bIns="45720" rtlCol="0"/>
+          <a:lstStyle>
+            <a:lvl1pPr algn="l">
+              <a:defRPr sz="1200"/>
+            </a:lvl1pPr>
+          </a:lstStyle>
+          <a:p>
+            <a:endParaRPr lang="en-US"/>
+          </a:p>
+        </p:txBody>
+      </p:sp>
+      <p:sp>
+        <p:nvSpPr>
+          <p:cNvPr id="3" name="Date Placeholder 2"/>
+          <p:cNvSpPr>
+            <a:spLocks noGrp="1"/>
+          </p:cNvSpPr>
+          <p:nvPr>
+            <p:ph type="dt" idx="1"/>
+          </p:nvPr>
+        </p:nvSpPr>
+        <p:spPr>
+          <a:xfrm>
+            <a:off x="3884613" y="0"/>
+            <a:ext cx="2971800" cy="457200"/>
+          </a:xfrm>
+          <a:prstGeom prst="rect">
+            <a:avLst/>
+          </a:prstGeom>
+        </p:spPr>
+        <p:txBody>
+          <a:bodyPr vert="horz" lIns="91440" tIns="45720" rIns="91440" bIns="45720" rtlCol="0"/>
+          <a:lstStyle>
+            <a:lvl1pPr algn="r">
+              <a:defRPr sz="1200"/>
+            </a:lvl1pPr>
+          </a:lstStyle>
+          <a:p>
+            <a:fld id="{0F89C1C7-3DCD-1040-A9CF-14679D8B5DDD}" type="datetimeFigureOut">
+              <a:rPr lang="en-US" smtClean="0"/>
+              <a:t>10/17/16</a:t>
+            </a:fld>
+            <a:endParaRPr lang="en-US"/>
+          </a:p>
+        </p:txBody>
+      </p:sp>
+      <p:sp>
+        <p:nvSpPr>
+          <p:cNvPr id="4" name="Slide Image Placeholder 3"/>
+          <p:cNvSpPr>
+            <a:spLocks noGrp="1" noRot="1" noChangeAspect="1"/>
+          </p:cNvSpPr>
+          <p:nvPr>
+            <p:ph type="sldImg" idx="2"/>
+          </p:nvPr>
+        </p:nvSpPr>
+        <p:spPr>
+          <a:xfrm>
+            <a:off x="1143000" y="685800"/>
+            <a:ext cx="4572000" cy="3429000"/>
+          </a:xfrm>
+          <a:prstGeom prst="rect">
+            <a:avLst/>
+          </a:prstGeom>
+          <a:noFill/>
+          <a:ln w="12700">
+            <a:solidFill>
+              <a:prstClr val="black"/>
+            </a:solidFill>
+          </a:ln>
+        </p:spPr>
+        <p:txBody>
+          <a:bodyPr vert="horz" lIns="91440" tIns="45720" rIns="91440" bIns="45720" rtlCol="0" anchor="ctr"/>
+          <a:lstStyle/>
+          <a:p>
+            <a:endParaRPr lang="en-US"/>
+          </a:p>
+        </p:txBody>
+      </p:sp>
+      <p:sp>
+        <p:nvSpPr>
+          <p:cNvPr id="5" name="Notes Placeholder 4"/>
+          <p:cNvSpPr>
+            <a:spLocks noGrp="1"/>
+          </p:cNvSpPr>
+          <p:nvPr>
+            <p:ph type="body" sz="quarter" idx="3"/>
+          </p:nvPr>
+        </p:nvSpPr>
+        <p:spPr>
+          <a:xfrm>
+            <a:off x="685800" y="4343400"/>
+            <a:ext cx="5486400" cy="4114800"/>
+          </a:xfrm>
+          <a:prstGeom prst="rect">
+            <a:avLst/>
+          </a:prstGeom>
+        </p:spPr>
+        <p:txBody>
+          <a:bodyPr vert="horz" lIns="91440" tIns="45720" rIns="91440" bIns="45720" rtlCol="0"/>
+          <a:lstStyle/>
+          <a:p>
+            <a:pPr lvl="0"/>
+            <a:r>
+              <a:rPr lang="en-US" smtClean="0"/>
+              <a:t>Click to edit Master text styles</a:t>
+            </a:r>
+          </a:p>
+          <a:p>
+            <a:pPr lvl="1"/>
+            <a:r>
+              <a:rPr lang="en-US" smtClean="0"/>
+              <a:t>Second level</a:t>
+            </a:r>
+          </a:p>
+          <a:p>
+            <a:pPr lvl="2"/>
+            <a:r>
+              <a:rPr lang="en-US" smtClean="0"/>
+              <a:t>Third level</a:t>
+            </a:r>
+          </a:p>
+          <a:p>
+            <a:pPr lvl="3"/>
+            <a:r>
+              <a:rPr lang="en-US" smtClean="0"/>
+              <a:t>Fourth level</a:t>
+            </a:r>
+          </a:p>
+          <a:p>
+            <a:pPr lvl="4"/>
+            <a:r>
+              <a:rPr lang="en-US" smtClean="0"/>
+              <a:t>Fifth level</a:t>
+            </a:r>
+            <a:endParaRPr lang="en-US"/>
+          </a:p>
+        </p:txBody>
+      </p:sp>
+      <p:sp>
+        <p:nvSpPr>
+          <p:cNvPr id="6" name="Footer Placeholder 5"/>
+          <p:cNvSpPr>
+            <a:spLocks noGrp="1"/>
+          </p:cNvSpPr>
+          <p:nvPr>
+            <p:ph type="ftr" sz="quarter" idx="4"/>
+          </p:nvPr>
+        </p:nvSpPr>
+        <p:spPr>
+          <a:xfrm>
+            <a:off x="0" y="8685213"/>
+            <a:ext cx="2971800" cy="457200"/>
+          </a:xfrm>
+          <a:prstGeom prst="rect">
+            <a:avLst/>
+          </a:prstGeom>
+        </p:spPr>
+        <p:txBody>
+          <a:bodyPr vert="horz" lIns="91440" tIns="45720" rIns="91440" bIns="45720" rtlCol="0" anchor="b"/>
+          <a:lstStyle>
+            <a:lvl1pPr algn="l">
+              <a:defRPr sz="1200"/>
+            </a:lvl1pPr>
+          </a:lstStyle>
+          <a:p>
+            <a:endParaRPr lang="en-US"/>
+          </a:p>
+        </p:txBody>
+      </p:sp>
+      <p:sp>
+        <p:nvSpPr>
+          <p:cNvPr id="7" name="Slide Number Placeholder 6"/>
+          <p:cNvSpPr>
+            <a:spLocks noGrp="1"/>
+          </p:cNvSpPr>
+          <p:nvPr>
+            <p:ph type="sldNum" sz="quarter" idx="5"/>
+          </p:nvPr>
+        </p:nvSpPr>
+        <p:spPr>
+          <a:xfrm>
+            <a:off x="3884613" y="8685213"/>
+            <a:ext cx="2971800" cy="457200"/>
+          </a:xfrm>
+          <a:prstGeom prst="rect">
+            <a:avLst/>
+          </a:prstGeom>
+        </p:spPr>
+        <p:txBody>
+          <a:bodyPr vert="horz" lIns="91440" tIns="45720" rIns="91440" bIns="45720" rtlCol="0" anchor="b"/>
+          <a:lstStyle>
+            <a:lvl1pPr algn="r">
+              <a:defRPr sz="1200"/>
+            </a:lvl1pPr>
+          </a:lstStyle>
+          <a:p>
+            <a:fld id="{BB5E49A5-4136-284D-997B-48E1D791AD67}" type="slidenum">
+              <a:rPr lang="en-US" smtClean="0"/>
+              <a:t>‹#›</a:t>
+            </a:fld>
+            <a:endParaRPr lang="en-US"/>
+          </a:p>
+        </p:txBody>
+      </p:sp>
     </p:spTree>
     <p:extLst>
       <p:ext uri="{BB962C8B-B14F-4D97-AF65-F5344CB8AC3E}">
-        <p14:creationId xmlns:p14="http://schemas.microsoft.com/office/powerpoint/2010/main" val="1150898437"/>
+        <p14:creationId xmlns:p14="http://schemas.microsoft.com/office/powerpoint/2010/main" val="2623252185"/>
       </p:ext>
     </p:extLst>
   </p:cSld>
   <p:clrMap bg1="lt1" tx1="dk1" bg2="lt2" tx2="dk2" accent1="accent1" accent2="accent2" accent3="accent3" accent4="accent4" accent5="accent5" accent6="accent6" hlink="hlink" folHlink="folHlink"/>
   <p:notesStyle>
-    <a:lvl1pPr marL="0" algn="l" defTabSz="914400" rtl="0" eaLnBrk="1" latinLnBrk="0" hangingPunct="1">
+    <a:lvl1pPr marL="0" algn="l" defTabSz="457200" rtl="0" eaLnBrk="1" latinLnBrk="0" hangingPunct="1">
       <a:defRPr sz="1200" kern="1200">
         <a:solidFill>
           <a:schemeClr val="tx1"/>
@@ -177,7 +399,7 @@
         <a:cs typeface="+mn-cs"/>
       </a:defRPr>
     </a:lvl1pPr>
-    <a:lvl2pPr marL="457200" algn="l" defTabSz="914400" rtl="0" eaLnBrk="1" latinLnBrk="0" hangingPunct="1">
+    <a:lvl2pPr marL="457200" algn="l" defTabSz="457200" rtl="0" eaLnBrk="1" latinLnBrk="0" hangingPunct="1">
       <a:defRPr sz="1200" kern="1200">
         <a:solidFill>
           <a:schemeClr val="tx1"/>
@@ -187,7 +409,7 @@
         <a:cs typeface="+mn-cs"/>
       </a:defRPr>
     </a:lvl2pPr>
-    <a:lvl3pPr marL="914400" algn="l" defTabSz="914400" rtl="0" eaLnBrk="1" latinLnBrk="0" hangingPunct="1">
+    <a:lvl3pPr marL="914400" algn="l" defTabSz="457200" rtl="0" eaLnBrk="1" latinLnBrk="0" hangingPunct="1">
       <a:defRPr sz="1200" kern="1200">
         <a:solidFill>
           <a:schemeClr val="tx1"/>
@@ -197,7 +419,7 @@
         <a:cs typeface="+mn-cs"/>
       </a:defRPr>
     </a:lvl3pPr>
-    <a:lvl4pPr marL="1371600" algn="l" defTabSz="914400" rtl="0" eaLnBrk="1" latinLnBrk="0" hangingPunct="1">
+    <a:lvl4pPr marL="1371600" algn="l" defTabSz="457200" rtl="0" eaLnBrk="1" latinLnBrk="0" hangingPunct="1">
       <a:defRPr sz="1200" kern="1200">
         <a:solidFill>
           <a:schemeClr val="tx1"/>
@@ -207,7 +429,7 @@
         <a:cs typeface="+mn-cs"/>
       </a:defRPr>
     </a:lvl4pPr>
-    <a:lvl5pPr marL="1828800" algn="l" defTabSz="914400" rtl="0" eaLnBrk="1" latinLnBrk="0" hangingPunct="1">
+    <a:lvl5pPr marL="1828800" algn="l" defTabSz="457200" rtl="0" eaLnBrk="1" latinLnBrk="0" hangingPunct="1">
       <a:defRPr sz="1200" kern="1200">
         <a:solidFill>
           <a:schemeClr val="tx1"/>
@@ -217,7 +439,7 @@
         <a:cs typeface="+mn-cs"/>
       </a:defRPr>
     </a:lvl5pPr>
-    <a:lvl6pPr marL="2286000" algn="l" defTabSz="914400" rtl="0" eaLnBrk="1" latinLnBrk="0" hangingPunct="1">
+    <a:lvl6pPr marL="2286000" algn="l" defTabSz="457200" rtl="0" eaLnBrk="1" latinLnBrk="0" hangingPunct="1">
       <a:defRPr sz="1200" kern="1200">
         <a:solidFill>
           <a:schemeClr val="tx1"/>
@@ -227,7 +449,7 @@
         <a:cs typeface="+mn-cs"/>
       </a:defRPr>
     </a:lvl6pPr>
-    <a:lvl7pPr marL="2743200" algn="l" defTabSz="914400" rtl="0" eaLnBrk="1" latinLnBrk="0" hangingPunct="1">
+    <a:lvl7pPr marL="2743200" algn="l" defTabSz="457200" rtl="0" eaLnBrk="1" latinLnBrk="0" hangingPunct="1">
       <a:defRPr sz="1200" kern="1200">
         <a:solidFill>
           <a:schemeClr val="tx1"/>
@@ -237,7 +459,7 @@
         <a:cs typeface="+mn-cs"/>
       </a:defRPr>
     </a:lvl7pPr>
-    <a:lvl8pPr marL="3200400" algn="l" defTabSz="914400" rtl="0" eaLnBrk="1" latinLnBrk="0" hangingPunct="1">
+    <a:lvl8pPr marL="3200400" algn="l" defTabSz="457200" rtl="0" eaLnBrk="1" latinLnBrk="0" hangingPunct="1">
       <a:defRPr sz="1200" kern="1200">
         <a:solidFill>
           <a:schemeClr val="tx1"/>
@@ -247,7 +469,7 @@
         <a:cs typeface="+mn-cs"/>
       </a:defRPr>
     </a:lvl8pPr>
-    <a:lvl9pPr marL="3657600" algn="l" defTabSz="914400" rtl="0" eaLnBrk="1" latinLnBrk="0" hangingPunct="1">
+    <a:lvl9pPr marL="3657600" algn="l" defTabSz="457200" rtl="0" eaLnBrk="1" latinLnBrk="0" hangingPunct="1">
       <a:defRPr sz="1200" kern="1200">
         <a:solidFill>
           <a:schemeClr val="tx1"/>
@@ -262,7 +484,7 @@
 </file>
 
 <file path=ppt/notesSlides/notesSlide1.xml><?xml version="1.0" encoding="utf-8"?>
-<p:notes xmlns:a="http://schemas.openxmlformats.org/drawingml/2006/main" xmlns:r="http://schemas.openxmlformats.org/officeDocument/2006/relationships" xmlns:p="http://schemas.openxmlformats.org/presentationml/2006/main">
+<p:notes xmlns:a="http://schemas.openxmlformats.org/drawingml/2006/main" xmlns:p="http://schemas.openxmlformats.org/presentationml/2006/main" xmlns:r="http://schemas.openxmlformats.org/officeDocument/2006/relationships">
   <p:cSld>
     <p:spTree>
       <p:nvGrpSpPr>
@@ -282,7 +504,7 @@
         <p:nvSpPr>
           <p:cNvPr id="2" name="Slide Image Placeholder 1"/>
           <p:cNvSpPr>
-            <a:spLocks noGrp="1" noRot="1" noChangeAspect="1"/>
+            <a:spLocks noGrp="1"/>
           </p:cNvSpPr>
           <p:nvPr>
             <p:ph type="sldImg" idx="2"/>
@@ -297,7 +519,7 @@
             <a:spLocks noGrp="1"/>
           </p:cNvSpPr>
           <p:nvPr>
-            <p:ph type="body" sz="quarter" idx="3"/>
+            <p:ph type="body" idx="3" sz="quarter"/>
           </p:nvPr>
         </p:nvSpPr>
         <p:spPr/>
@@ -309,17 +531,13 @@
               <a:t>SLIDE 1 — Apertura</a:t>
             </a:r>
           </a:p>
-          <a:p>
-            <a:endParaRPr/>
-          </a:p>
+          <a:p/>
           <a:p>
             <a:r>
               <a:t>Questo deck spiega la catena completa dei 4 notebook di IPScore (cartella 8_ipscore_rebuild/), il "secondo blocco" del Modulo 8 che nella tua parte principale avevi lasciato fuori (lì presentavi solo il notebook 1 e la lettura del report finito).</a:t>
             </a:r>
           </a:p>
-          <a:p>
-            <a:endParaRPr/>
-          </a:p>
+          <a:p/>
           <a:p>
             <a:r>
               <a:t>Idea guida da comunicare subito: i 4 notebook non sono 4 esercizi separati, sono un'unica catena in cui ognuno passa qualcosa al successivo:</a:t>
@@ -345,9 +563,7 @@
               <a:t>4) assemble_tool — assembla tutto in un report unico</a:t>
             </a:r>
           </a:p>
-          <a:p>
-            <a:endParaRPr/>
-          </a:p>
+          <a:p/>
           <a:p>
             <a:r>
               <a:t>Nota per te: qui si parla del modello "EPO IPScore 3.01", motore e materiale del corso di Arne Krüger; l'analisi di scenario (notebook 3) è ispirata al "NPV Target Planner" di Riccardo Priore — quindi stessa attribuzione doppia che avevi già visto nel Modulo 6 (Priore) e nel Modulo 8 (Krüger).</a:t>
@@ -362,7 +578,7 @@
             <a:spLocks noGrp="1"/>
           </p:cNvSpPr>
           <p:nvPr>
-            <p:ph type="sldNum" sz="quarter" idx="5"/>
+            <p:ph type="sldNum" idx="5" sz="quarter"/>
           </p:nvPr>
         </p:nvSpPr>
         <p:spPr/>
@@ -376,7 +592,7 @@
 </file>
 
 <file path=ppt/notesSlides/notesSlide10.xml><?xml version="1.0" encoding="utf-8"?>
-<p:notes xmlns:a="http://schemas.openxmlformats.org/drawingml/2006/main" xmlns:r="http://schemas.openxmlformats.org/officeDocument/2006/relationships" xmlns:p="http://schemas.openxmlformats.org/presentationml/2006/main">
+<p:notes xmlns:a="http://schemas.openxmlformats.org/drawingml/2006/main" xmlns:p="http://schemas.openxmlformats.org/presentationml/2006/main" xmlns:r="http://schemas.openxmlformats.org/officeDocument/2006/relationships">
   <p:cSld>
     <p:spTree>
       <p:nvGrpSpPr>
@@ -396,7 +612,7 @@
         <p:nvSpPr>
           <p:cNvPr id="2" name="Slide Image Placeholder 1"/>
           <p:cNvSpPr>
-            <a:spLocks noGrp="1" noRot="1" noChangeAspect="1"/>
+            <a:spLocks noGrp="1"/>
           </p:cNvSpPr>
           <p:nvPr>
             <p:ph type="sldImg" idx="2"/>
@@ -411,7 +627,7 @@
             <a:spLocks noGrp="1"/>
           </p:cNvSpPr>
           <p:nvPr>
-            <p:ph type="body" sz="quarter" idx="3"/>
+            <p:ph type="body" idx="3" sz="quarter"/>
           </p:nvPr>
         </p:nvSpPr>
         <p:spPr/>
@@ -423,41 +639,31 @@
               <a:t>SLIDE 10 — Le tre frasi da portare a casa</a:t>
             </a:r>
           </a:p>
-          <a:p>
-            <a:endParaRPr/>
-          </a:p>
+          <a:p/>
           <a:p>
             <a:r>
               <a:t>Questa è la slide di sintesi: se il tempo stringe, sono le tre cose che DEVONO restare al pubblico, anche saltando tutti i dettagli tecnici precedenti.</a:t>
             </a:r>
           </a:p>
-          <a:p>
-            <a:endParaRPr/>
-          </a:p>
+          <a:p/>
           <a:p>
             <a:r>
               <a:t>1) Solo 8 risposte su 40 muovono davvero l'NPV — le altre 32 costruiscono il profilo, la mappa del rischio, la base per la conversazione col cliente, ma non cambiano il numero in euro di un centesimo. Lo si è visto da due punti di vista indipendenti: il grafico a pallini del notebook 1 (slide 4) e il grafico a tornado del notebook 3 (slide 7) — stesso fatto, confermato due volte con metodi diversi.</a:t>
             </a:r>
           </a:p>
-          <a:p>
-            <a:endParaRPr/>
-          </a:p>
+          <a:p/>
           <a:p>
             <a:r>
               <a:t>2) Le 11 domande verificabili con PATSTAT non sono tra le 8 che contano economicamente — verificarle rende la valutazione più solida e più difendibile (stato legale reale, copertura geografica reale, impronta del richiedente) ma, di nuovo, non sposta l'NPV.</a:t>
             </a:r>
           </a:p>
-          <a:p>
-            <a:endParaRPr/>
-          </a:p>
+          <a:p/>
           <a:p>
             <a:r>
               <a:t>3) Il report si costruisce sempre, e dichiara sempre cosa manca — se esegui solo i notebook 1 e 4 (saltando 2 e 3), ottieni comunque un report completo e onesto che dice chiaramente "0 measured · 40 judgement". Aggiungendo 2 e 3 lo stesso report guadagna dati misurati e una classifica di sensibilità, ma la STRUTTURA resta identica.</a:t>
             </a:r>
           </a:p>
-          <a:p>
-            <a:endParaRPr/>
-          </a:p>
+          <a:p/>
           <a:p>
             <a:r>
               <a:t>Nota di raccordo per la presentazione: questo è lo stesso principio di onestà metodologica già visto nella tua parte principale sul Modulo 8 — un numero esatto costruito su risposte soggettive resta un'opinione strutturata, e il sistema è progettato per dirlo apertamente invece di nasconderlo.</a:t>
@@ -472,7 +678,7 @@
             <a:spLocks noGrp="1"/>
           </p:cNvSpPr>
           <p:nvPr>
-            <p:ph type="sldNum" sz="quarter" idx="5"/>
+            <p:ph type="sldNum" idx="5" sz="quarter"/>
           </p:nvPr>
         </p:nvSpPr>
         <p:spPr/>
@@ -486,7 +692,7 @@
 </file>
 
 <file path=ppt/notesSlides/notesSlide11.xml><?xml version="1.0" encoding="utf-8"?>
-<p:notes xmlns:a="http://schemas.openxmlformats.org/drawingml/2006/main" xmlns:r="http://schemas.openxmlformats.org/officeDocument/2006/relationships" xmlns:p="http://schemas.openxmlformats.org/presentationml/2006/main">
+<p:notes xmlns:a="http://schemas.openxmlformats.org/drawingml/2006/main" xmlns:p="http://schemas.openxmlformats.org/presentationml/2006/main" xmlns:r="http://schemas.openxmlformats.org/officeDocument/2006/relationships">
   <p:cSld>
     <p:spTree>
       <p:nvGrpSpPr>
@@ -506,7 +712,7 @@
         <p:nvSpPr>
           <p:cNvPr id="2" name="Slide Image Placeholder 1"/>
           <p:cNvSpPr>
-            <a:spLocks noGrp="1" noRot="1" noChangeAspect="1"/>
+            <a:spLocks noGrp="1"/>
           </p:cNvSpPr>
           <p:nvPr>
             <p:ph type="sldImg" idx="2"/>
@@ -521,7 +727,7 @@
             <a:spLocks noGrp="1"/>
           </p:cNvSpPr>
           <p:nvPr>
-            <p:ph type="body" sz="quarter" idx="3"/>
+            <p:ph type="body" idx="3" sz="quarter"/>
           </p:nvPr>
         </p:nvSpPr>
         <p:spPr/>
@@ -533,9 +739,7 @@
               <a:t>SLIDE 11 — Chiusura</a:t>
             </a:r>
           </a:p>
-          <a:p>
-            <a:endParaRPr/>
-          </a:p>
+          <a:p/>
           <a:p>
             <a:r>
               <a:t>Slide di ringraziamento con i riferimenti per chi vuole approfondire dopo la conferenza:</a:t>
@@ -556,9 +760,7 @@
               <a:t>- La cartella 7_ipscore/ resta la versione "pronta per il workshop", non toccata, usata come riferimento di lavoro originale — utile se qualcuno chiede "questo si può usare subito in una sessione con un cliente?"</a:t>
             </a:r>
           </a:p>
-          <a:p>
-            <a:endParaRPr/>
-          </a:p>
+          <a:p/>
           <a:p>
             <a:r>
               <a:t>Ultimo richiamo utile in chiusura: ribadire che IPScore è uno strumento dell'EPO, e che questo Modulo 8 è un'implementazione indipendente del corso (verificata contro il workbook ufficiale) — così resta chiaro a un pubblico EPO/PATLIB cosa è "ufficiale" e cosa è materiale didattico costruito sopra.</a:t>
@@ -573,7 +775,7 @@
             <a:spLocks noGrp="1"/>
           </p:cNvSpPr>
           <p:nvPr>
-            <p:ph type="sldNum" sz="quarter" idx="5"/>
+            <p:ph type="sldNum" idx="5" sz="quarter"/>
           </p:nvPr>
         </p:nvSpPr>
         <p:spPr/>
@@ -587,7 +789,7 @@
 </file>
 
 <file path=ppt/notesSlides/notesSlide2.xml><?xml version="1.0" encoding="utf-8"?>
-<p:notes xmlns:a="http://schemas.openxmlformats.org/drawingml/2006/main" xmlns:r="http://schemas.openxmlformats.org/officeDocument/2006/relationships" xmlns:p="http://schemas.openxmlformats.org/presentationml/2006/main">
+<p:notes xmlns:a="http://schemas.openxmlformats.org/drawingml/2006/main" xmlns:p="http://schemas.openxmlformats.org/presentationml/2006/main" xmlns:r="http://schemas.openxmlformats.org/officeDocument/2006/relationships">
   <p:cSld>
     <p:spTree>
       <p:nvGrpSpPr>
@@ -607,7 +809,7 @@
         <p:nvSpPr>
           <p:cNvPr id="2" name="Slide Image Placeholder 1"/>
           <p:cNvSpPr>
-            <a:spLocks noGrp="1" noRot="1" noChangeAspect="1"/>
+            <a:spLocks noGrp="1"/>
           </p:cNvSpPr>
           <p:nvPr>
             <p:ph type="sldImg" idx="2"/>
@@ -622,7 +824,7 @@
             <a:spLocks noGrp="1"/>
           </p:cNvSpPr>
           <p:nvPr>
-            <p:ph type="body" sz="quarter" idx="3"/>
+            <p:ph type="body" idx="3" sz="quarter"/>
           </p:nvPr>
         </p:nvSpPr>
         <p:spPr/>
@@ -634,25 +836,19 @@
               <a:t>SLIDE 2 — Il problema che IPScore risolve</a:t>
             </a:r>
           </a:p>
-          <a:p>
-            <a:endParaRPr/>
-          </a:p>
+          <a:p/>
           <a:p>
             <a:r>
               <a:t>Qui si pongono le basi teoriche, utili se il pubblico non conosce il concetto di NPV.</a:t>
             </a:r>
           </a:p>
-          <a:p>
-            <a:endParaRPr/>
-          </a:p>
+          <a:p/>
           <a:p>
             <a:r>
               <a:t>NPV (Net Present Value / Valore Attuale Netto): un euro che arriverà tra 5 anni vale meno di un euro in tasca oggi (per via dell'inflazione, del rischio, del costo-opportunità del capitale). Il modello "sconta" ogni flusso di cassa futuro con un tasso di sconto e poi somma i 10 flussi annuali scontati in un unico numero: "quanto vale oggi tutto ciò che questo brevetto farà guadagnare (o farà risparmiare) nei prossimi 10 anni".</a:t>
             </a:r>
           </a:p>
-          <a:p>
-            <a:endParaRPr/>
-          </a:p>
+          <a:p/>
           <a:p>
             <a:r>
               <a:t>Il questionario: 40 domande su scala 1-5, in 5 sezioni (stato legale, tecnologia, mercato, finanza, strategia). Punto da sottolineare: le opzioni di risposta sono scritte per esteso per ciascuna domanda (non lasciate al giudizio libero), proprio perché due persone diverse che valutano lo stesso brevetto devono arrivare allo stesso punteggio — è un tentativo di rendere oggettivo un processo che resta comunque soggettivo nella sostanza (lo vedrete meglio nelle slide successive).</a:t>
@@ -667,7 +863,7 @@
             <a:spLocks noGrp="1"/>
           </p:cNvSpPr>
           <p:nvPr>
-            <p:ph type="sldNum" sz="quarter" idx="5"/>
+            <p:ph type="sldNum" idx="5" sz="quarter"/>
           </p:nvPr>
         </p:nvSpPr>
         <p:spPr/>
@@ -681,7 +877,7 @@
 </file>
 
 <file path=ppt/notesSlides/notesSlide3.xml><?xml version="1.0" encoding="utf-8"?>
-<p:notes xmlns:a="http://schemas.openxmlformats.org/drawingml/2006/main" xmlns:r="http://schemas.openxmlformats.org/officeDocument/2006/relationships" xmlns:p="http://schemas.openxmlformats.org/presentationml/2006/main">
+<p:notes xmlns:a="http://schemas.openxmlformats.org/drawingml/2006/main" xmlns:p="http://schemas.openxmlformats.org/presentationml/2006/main" xmlns:r="http://schemas.openxmlformats.org/officeDocument/2006/relationships">
   <p:cSld>
     <p:spTree>
       <p:nvGrpSpPr>
@@ -701,7 +897,7 @@
         <p:nvSpPr>
           <p:cNvPr id="2" name="Slide Image Placeholder 1"/>
           <p:cNvSpPr>
-            <a:spLocks noGrp="1" noRot="1" noChangeAspect="1"/>
+            <a:spLocks noGrp="1"/>
           </p:cNvSpPr>
           <p:nvPr>
             <p:ph type="sldImg" idx="2"/>
@@ -716,7 +912,7 @@
             <a:spLocks noGrp="1"/>
           </p:cNvSpPr>
           <p:nvPr>
-            <p:ph type="body" sz="quarter" idx="3"/>
+            <p:ph type="body" idx="3" sz="quarter"/>
           </p:nvPr>
         </p:nvSpPr>
         <p:spPr/>
@@ -728,17 +924,13 @@
               <a:t>SLIDE 3 — Come si leggono i 4 notebook insieme</a:t>
             </a:r>
           </a:p>
-          <a:p>
-            <a:endParaRPr/>
-          </a:p>
+          <a:p/>
           <a:p>
             <a:r>
               <a:t>Concetto chiave di questa slide, il più importante per capire l'architettura: i notebook 1 e 4 sono "la spina dorsale" (costruiscono sempre le sezioni del report, indipendentemente dagli altri); i notebook 2 e 3 sono "opzionali" nel senso che arricchiscono il report ma non sono strutturalmente necessari.</a:t>
             </a:r>
           </a:p>
-          <a:p>
-            <a:endParaRPr/>
-          </a:p>
+          <a:p/>
           <a:p>
             <a:r>
               <a:t>Cosa significa in pratica:</a:t>
@@ -764,17 +956,13 @@
               <a:t>- Notebook 4 (assemble_tool): legge tutto quello che trova e assembla il report finale, con o senza il contributo di 2 e 3</a:t>
             </a:r>
           </a:p>
-          <a:p>
-            <a:endParaRPr/>
-          </a:p>
+          <a:p/>
           <a:p>
             <a:r>
               <a:t>Messaggio da dare al pubblico: se per mancanza di tempo o di accesso a TIP salti i notebook 2 e 3, il report finale esiste comunque, è completo e onesto — semplicemente dichiara "0 measured, 40 judgement" invece di mostrare dati misurati. Non è un report "rotto a metà", è un report che dice chiaramente quanto è fondato.</a:t>
             </a:r>
           </a:p>
-          <a:p>
-            <a:endParaRPr/>
-          </a:p>
+          <a:p/>
           <a:p>
             <a:r>
               <a:t>Ordine di esecuzione: sempre 1 → 2 → 3 → 4.</a:t>
@@ -789,7 +977,7 @@
             <a:spLocks noGrp="1"/>
           </p:cNvSpPr>
           <p:nvPr>
-            <p:ph type="sldNum" sz="quarter" idx="5"/>
+            <p:ph type="sldNum" idx="5" sz="quarter"/>
           </p:nvPr>
         </p:nvSpPr>
         <p:spPr/>
@@ -803,7 +991,7 @@
 </file>
 
 <file path=ppt/notesSlides/notesSlide4.xml><?xml version="1.0" encoding="utf-8"?>
-<p:notes xmlns:a="http://schemas.openxmlformats.org/drawingml/2006/main" xmlns:r="http://schemas.openxmlformats.org/officeDocument/2006/relationships" xmlns:p="http://schemas.openxmlformats.org/presentationml/2006/main">
+<p:notes xmlns:a="http://schemas.openxmlformats.org/drawingml/2006/main" xmlns:p="http://schemas.openxmlformats.org/presentationml/2006/main" xmlns:r="http://schemas.openxmlformats.org/officeDocument/2006/relationships">
   <p:cSld>
     <p:spTree>
       <p:nvGrpSpPr>
@@ -823,7 +1011,7 @@
         <p:nvSpPr>
           <p:cNvPr id="2" name="Slide Image Placeholder 1"/>
           <p:cNvSpPr>
-            <a:spLocks noGrp="1" noRot="1" noChangeAspect="1"/>
+            <a:spLocks noGrp="1"/>
           </p:cNvSpPr>
           <p:nvPr>
             <p:ph type="sldImg" idx="2"/>
@@ -838,7 +1026,7 @@
             <a:spLocks noGrp="1"/>
           </p:cNvSpPr>
           <p:nvPr>
-            <p:ph type="body" sz="quarter" idx="3"/>
+            <p:ph type="body" idx="3" sz="quarter"/>
           </p:nvPr>
         </p:nvSpPr>
         <p:spPr/>
@@ -850,25 +1038,19 @@
               <a:t>SLIDE 4 — Il grafico a pallini: le 40 domande e le 8 che contano</a:t>
             </a:r>
           </a:p>
-          <a:p>
-            <a:endParaRPr/>
-          </a:p>
+          <a:p/>
           <a:p>
             <a:r>
               <a:t>QUESTO È IL GRAFICO PIÙ IMPORTANTE DI TUTTO IL MODULO 8. Vale la pena rallentare qui.</a:t>
             </a:r>
           </a:p>
-          <a:p>
-            <a:endParaRPr/>
-          </a:p>
+          <a:p/>
           <a:p>
             <a:r>
               <a:t>Come si legge: ogni pallino è una delle 40 domande del questionario, organizzate in righe per sezione (A · Legal status, B · Technology, C · Market conditions, D · Finance, E · Strategy) e colonne che numerano le domande all'interno di ogni sezione (quindi A1...A8, B1...B8, ecc. — attenzione: il numero di domande per sezione non è necessariamente 8 in ognuna, la griglia è solo una disposizione visiva).</a:t>
             </a:r>
           </a:p>
-          <a:p>
-            <a:endParaRPr/>
-          </a:p>
+          <a:p/>
           <a:p>
             <a:r>
               <a:t>- Pallini GRIGI = la risposta entra solo nel "profilo" del brevetto (il grafico radar che vedrete alla slide 8) — non tocca mai il calcolo economico</a:t>
@@ -879,17 +1061,13 @@
               <a:t>- Pallini BLU = queste 8 domande sono le "OEK" (Output Economic Konstanten / domande economiche): B5, C2, C3, C6, D1, D2, D3, D4. Ogni risposta 1-5 a queste domande viene convertita, tramite una tabella fissa dell'EPO, in una quantità economica concreta (es. una percentuale di crescita di mercato, un costo, un numero di anni)</a:t>
             </a:r>
           </a:p>
-          <a:p>
-            <a:endParaRPr/>
-          </a:p>
+          <a:p/>
           <a:p>
             <a:r>
               <a:t>Messaggio chiave da dire ad alta voce: "il pallino non dice quanto conta la domanda per il giudizio complessivo — dice se quella domanda entra o no nella formula che produce l'euro finale". Le altre 32 domande (grigie) contano moltissimo per capire IL BREVETTO, ma zero per calcolare QUANTO VALE.</a:t>
             </a:r>
           </a:p>
-          <a:p>
-            <a:endParaRPr/>
-          </a:p>
+          <a:p/>
           <a:p>
             <a:r>
               <a:t>Il riquadro sotto (giallo, "acceptance test"): il motore Python del notebook deve riprodurre ESATTAMENTE (fino al centesimo) i 3 valori di test che l'EPO fornisce nel proprio workbook ufficiale, prima ancora di poter calcolare qualsiasi altro brevetto. I tre casi test sono scelti apposta per essere "scomodi": uno dà un NPV chiaramente positivo, uno è positivo ma vicinissimo allo zero, uno è negativo. Un errore di calcolo (per esempio un classico off-by-one, cioè un errore di indice di uno) verrebbe smascherato subito da questo test, mentre potrebbe restare invisibile se si testasse solo con casi "facili". Questo è il principio, generale e riutilizzabile fuori da IPScore: verificare sempre contro una fonte di verità esterna, non contro il proprio risultato precedente.</a:t>
@@ -904,7 +1082,7 @@
             <a:spLocks noGrp="1"/>
           </p:cNvSpPr>
           <p:nvPr>
-            <p:ph type="sldNum" sz="quarter" idx="5"/>
+            <p:ph type="sldNum" idx="5" sz="quarter"/>
           </p:nvPr>
         </p:nvSpPr>
         <p:spPr/>
@@ -918,7 +1096,7 @@
 </file>
 
 <file path=ppt/notesSlides/notesSlide5.xml><?xml version="1.0" encoding="utf-8"?>
-<p:notes xmlns:a="http://schemas.openxmlformats.org/drawingml/2006/main" xmlns:r="http://schemas.openxmlformats.org/officeDocument/2006/relationships" xmlns:p="http://schemas.openxmlformats.org/presentationml/2006/main">
+<p:notes xmlns:a="http://schemas.openxmlformats.org/drawingml/2006/main" xmlns:p="http://schemas.openxmlformats.org/presentationml/2006/main" xmlns:r="http://schemas.openxmlformats.org/officeDocument/2006/relationships">
   <p:cSld>
     <p:spTree>
       <p:nvGrpSpPr>
@@ -938,7 +1116,7 @@
         <p:nvSpPr>
           <p:cNvPr id="2" name="Slide Image Placeholder 1"/>
           <p:cNvSpPr>
-            <a:spLocks noGrp="1" noRot="1" noChangeAspect="1"/>
+            <a:spLocks noGrp="1"/>
           </p:cNvSpPr>
           <p:nvPr>
             <p:ph type="sldImg" idx="2"/>
@@ -953,7 +1131,7 @@
             <a:spLocks noGrp="1"/>
           </p:cNvSpPr>
           <p:nvPr>
-            <p:ph type="body" sz="quarter" idx="3"/>
+            <p:ph type="body" idx="3" sz="quarter"/>
           </p:nvPr>
         </p:nvSpPr>
         <p:spPr/>
@@ -965,17 +1143,13 @@
               <a:t>SLIDE 5 — Il grafico a barre impilate: come nasce il numero finale</a:t>
             </a:r>
           </a:p>
-          <a:p>
-            <a:endParaRPr/>
-          </a:p>
+          <a:p/>
           <a:p>
             <a:r>
               <a:t>Prima la logica, poi il grafico.</a:t>
             </a:r>
           </a:p>
-          <a:p>
-            <a:endParaRPr/>
-          </a:p>
+          <a:p/>
           <a:p>
             <a:r>
               <a:t>Due ingredienti:</a:t>
@@ -991,17 +1165,13 @@
               <a:t>2) Il flusso di cassa, con 6 componenti che sommano (+ ricavi, + ricavi recuperati, + efficienza, + investimento risparmiato) o sottraggono (− costi, − investimento una tantum)</a:t>
             </a:r>
           </a:p>
-          <a:p>
-            <a:endParaRPr/>
-          </a:p>
+          <a:p/>
           <a:p>
             <a:r>
               <a:t>Come si legge il grafico: sull'asse orizzontale ci sono gli anni (1-10), sull'asse verticale la percentuale del fatturato aziendale. Le barre SOPRA lo zero (verdi/arancioni/blu) rappresentano le componenti che AGGIUNGONO liquidità; le barre SOTTO lo zero (viola/rosse) rappresentano le componenti che la SOTTRAGGONO. La linea nera che attraversa il grafico è il saldo netto anno per anno, PRIMA dello sconto finanziario.</a:t>
             </a:r>
           </a:p>
-          <a:p>
-            <a:endParaRPr/>
-          </a:p>
+          <a:p/>
           <a:p>
             <a:r>
               <a:t>IMPORTANTE — cosa mostra davvero il grafico (chiarire bene al pubblico, non è ovvio): il titolo dice "what the patent ADDS to the company's liquidity" — il grafico non è la fotografia dell'azienda, è la DIFFERENZA rispetto a uno scenario controfattuale in cui l'azienda esistesse ma senza QUESTO brevetto. Ognuna delle 6 componenti è già costruita come un differenziale "con brevetto meno senza brevetto":</a:t>
@@ -1027,25 +1197,19 @@
               <a:t>Le 8 risposte OEK (B5, C2, C3, C6, D1-D4, viste alla slide 4) sono ciò che fissa, tramite le tabelle di conversione EPO, il valore concreto di ciascuna componente anno per anno.</a:t>
             </a:r>
           </a:p>
-          <a:p>
-            <a:endParaRPr/>
-          </a:p>
+          <a:p/>
           <a:p>
             <a:r>
               <a:t>Nota visiva corretta (attenzione, qui il dettaglio conta): la linea nera scende sotto zero SOLO nell'anno 1 (circa -3%, solo costi di sviluppo, nessun ricavo). Già dall'anno 2 il valore è positivo e cresce progressivamente fino all'anno 9. Tra l'anno 9 e l'anno 10 la linea crolla di colpo a zero: è il punto in cui finisce la vita commerciale della tecnologia (governata dalla risposta C3) — da quell'anno in poi non ci sono più barre, quindi nessun flusso, indipendentemente da quanti anni di brevetto restino ancora validi.</a:t>
             </a:r>
           </a:p>
-          <a:p>
-            <a:endParaRPr/>
-          </a:p>
+          <a:p/>
           <a:p>
             <a:r>
               <a:t>IL MODELLO NON PRESUPPONE UN ESITO POSITIVO — punto da dire esplicitamente al pubblico: il fatto che in questo esempio (EP3074539B1) la linea resti quasi sempre sopra zero è una caratteristica di QUESTO caso, non del metodo. Nulla nel modello impedisce che, per un altro brevetto o con altre risposte alle 8 domande OEK, il saldo netto resti negativo per più anni o per l'intero orizzonte di 10 anni — significherebbe che possedere quel brevetto costa più di quanto renda. Prova diretta nel materiale: tra i 3 brevetti di test ufficiali EPO usati per l'acceptance test del notebook 1 (slide 4), uno ha NPV negativo (-4.686,36 EUR) — scelto apposta dall'EPO per verificare che il motore gestisca correttamente anche uno scenario sfavorevole, non solo casi di successo. Il metodo tratta allo stesso identico modo un brevetto che genera valore e uno che lo distrugge.</a:t>
             </a:r>
           </a:p>
-          <a:p>
-            <a:endParaRPr/>
-          </a:p>
+          <a:p/>
           <a:p>
             <a:r>
               <a:t>COME LA LINEA NERA DIVENTA L'NPV — è importante spiegarlo esplicitamente, perché non è un dettaglio decorativo del grafico:</a:t>
@@ -1066,9 +1230,7 @@
               <a:t>In una frase: il grafico a barre mostra DA COSA è composto ogni punto della linea nera; la linea nera stessa è la sequenza di numeri che, scontati e sommati, produce il numero finale (1.248.870 EUR nel caso di questo brevetto).</a:t>
             </a:r>
           </a:p>
-          <a:p>
-            <a:endParaRPr/>
-          </a:p>
+          <a:p/>
           <a:p>
             <a:r>
               <a:t>I due errori classici che il notebook mette in guardia (utili da citare come "cose che sembrano ovvie ma non lo sono"):</a:t>
@@ -1084,9 +1246,7 @@
               <a:t>2) L'investimento in attrezzature è UNA TANTUM, non si ripete ogni anno — distribuirlo su tutti i 10 anni per errore può capovolgere una valutazione da positiva a negativa</a:t>
             </a:r>
           </a:p>
-          <a:p>
-            <a:endParaRPr/>
-          </a:p>
+          <a:p/>
           <a:p>
             <a:r>
               <a:t>In fondo alla slide: "Hands off — nothing else to hand off yet" significa che a questo punto della catena (dopo solo il notebook 1) l'unica cosa prodotta e passata avanti è il motore di calcolo verificato (ipscore_kit.py) — non c'è ancora nessun file di dati da passare al notebook successivo, perché il notebook 2 lavora sulle risposte, non sul motore.</a:t>
@@ -1101,7 +1261,7 @@
             <a:spLocks noGrp="1"/>
           </p:cNvSpPr>
           <p:nvPr>
-            <p:ph type="sldNum" sz="quarter" idx="5"/>
+            <p:ph type="sldNum" idx="5" sz="quarter"/>
           </p:nvPr>
         </p:nvSpPr>
         <p:spPr/>
@@ -1115,7 +1275,7 @@
 </file>
 
 <file path=ppt/notesSlides/notesSlide6.xml><?xml version="1.0" encoding="utf-8"?>
-<p:notes xmlns:a="http://schemas.openxmlformats.org/drawingml/2006/main" xmlns:r="http://schemas.openxmlformats.org/officeDocument/2006/relationships" xmlns:p="http://schemas.openxmlformats.org/presentationml/2006/main">
+<p:notes xmlns:a="http://schemas.openxmlformats.org/drawingml/2006/main" xmlns:p="http://schemas.openxmlformats.org/presentationml/2006/main" xmlns:r="http://schemas.openxmlformats.org/officeDocument/2006/relationships">
   <p:cSld>
     <p:spTree>
       <p:nvGrpSpPr>
@@ -1135,7 +1295,7 @@
         <p:nvSpPr>
           <p:cNvPr id="2" name="Slide Image Placeholder 1"/>
           <p:cNvSpPr>
-            <a:spLocks noGrp="1" noRot="1" noChangeAspect="1"/>
+            <a:spLocks noGrp="1"/>
           </p:cNvSpPr>
           <p:nvPr>
             <p:ph type="sldImg" idx="2"/>
@@ -1150,7 +1310,7 @@
             <a:spLocks noGrp="1"/>
           </p:cNvSpPr>
           <p:nvPr>
-            <p:ph type="body" sz="quarter" idx="3"/>
+            <p:ph type="body" idx="3" sz="quarter"/>
           </p:nvPr>
         </p:nvSpPr>
         <p:spPr/>
@@ -1162,17 +1322,13 @@
               <a:t>SLIDE 6 — Il grafico a barre orizzontali: cosa cambia con PATSTAT</a:t>
             </a:r>
           </a:p>
-          <a:p>
-            <a:endParaRPr/>
-          </a:p>
+          <a:p/>
           <a:p>
             <a:r>
               <a:t>Qui entra in scena l'unico notebook che richiede davvero una connessione a TIP/PATSTAT.</a:t>
             </a:r>
           </a:p>
-          <a:p>
-            <a:endParaRPr/>
-          </a:p>
+          <a:p/>
           <a:p>
             <a:r>
               <a:t>Come si legge il grafico: sono mostrate solo le 5 domande (su 11 verificabili in totale) per cui la risposta è effettivamente CAMBIATA dopo aver interrogato PATSTAT. Ogni domanda ha due barre sovrapposte:</a:t>
@@ -1188,25 +1344,19 @@
               <a:t>- barra VERDE = quello che dice davvero il record ufficiale PATSTAT</a:t>
             </a:r>
           </a:p>
-          <a:p>
-            <a:endParaRPr/>
-          </a:p>
+          <a:p/>
           <a:p>
             <a:r>
               <a:t>Le 5 domande mostrate: E2 (conquista di nuovi mercati), E1 (consolidamento di mercati esistenti), A4 (ampiezza delle rivendicazioni/claims), A3 (durata residua del brevetto), A1 (stato legale del brevetto). Notare che sono tutte domande di sezione A o E — quindi stato legale e strategia, non le domande economiche "OEK".</a:t>
             </a:r>
           </a:p>
-          <a:p>
-            <a:endParaRPr/>
-          </a:p>
+          <a:p/>
           <a:p>
             <a:r>
               <a:t>Il punto da sottolineare con forza (riquadro rosso a destra): NESSUNA di queste 11 domande verificabili tramite PATSTAT è tra le 8 domande OEK che determinano l'NPV. Quindi tutto questo lavoro di verifica — utile e importante — non sposta il valore in euro nemmeno di un centesimo.</a:t>
             </a:r>
           </a:p>
-          <a:p>
-            <a:endParaRPr/>
-          </a:p>
+          <a:p/>
           <a:p>
             <a:r>
               <a:t>Allora perché farlo? Il riquadro sotto risponde: 1) evita di sbagliare sui fatti oggettivi (un brevetto revocato o decaduto vale zero, indipendentemente da quanto sia rosea la previsione di mercato); 2) rende la valutazione VERIFICABILE — ogni risposta "measured" porta con sé una data e un codice di evento legale, quindi un cliente può controllare da dove viene quel numero; 3) produce un file preciso, evidence_answers.json, che i notebook 3 e 4 useranno automaticamente al posto delle stime iniziali dell'esperto.</a:t>
@@ -1221,7 +1371,7 @@
             <a:spLocks noGrp="1"/>
           </p:cNvSpPr>
           <p:nvPr>
-            <p:ph type="sldNum" sz="quarter" idx="5"/>
+            <p:ph type="sldNum" idx="5" sz="quarter"/>
           </p:nvPr>
         </p:nvSpPr>
         <p:spPr/>
@@ -1235,7 +1385,7 @@
 </file>
 
 <file path=ppt/notesSlides/notesSlide7.xml><?xml version="1.0" encoding="utf-8"?>
-<p:notes xmlns:a="http://schemas.openxmlformats.org/drawingml/2006/main" xmlns:r="http://schemas.openxmlformats.org/officeDocument/2006/relationships" xmlns:p="http://schemas.openxmlformats.org/presentationml/2006/main">
+<p:notes xmlns:a="http://schemas.openxmlformats.org/drawingml/2006/main" xmlns:p="http://schemas.openxmlformats.org/presentationml/2006/main" xmlns:r="http://schemas.openxmlformats.org/officeDocument/2006/relationships">
   <p:cSld>
     <p:spTree>
       <p:nvGrpSpPr>
@@ -1255,7 +1405,7 @@
         <p:nvSpPr>
           <p:cNvPr id="2" name="Slide Image Placeholder 1"/>
           <p:cNvSpPr>
-            <a:spLocks noGrp="1" noRot="1" noChangeAspect="1"/>
+            <a:spLocks noGrp="1"/>
           </p:cNvSpPr>
           <p:nvPr>
             <p:ph type="sldImg" idx="2"/>
@@ -1270,7 +1420,7 @@
             <a:spLocks noGrp="1"/>
           </p:cNvSpPr>
           <p:nvPr>
-            <p:ph type="body" sz="quarter" idx="3"/>
+            <p:ph type="body" idx="3" sz="quarter"/>
           </p:nvPr>
         </p:nvSpPr>
         <p:spPr/>
@@ -1282,25 +1432,19 @@
               <a:t>SLIDE 7 — Il grafico "a tornado": quale domanda conviene discutere</a:t>
             </a:r>
           </a:p>
-          <a:p>
-            <a:endParaRPr/>
-          </a:p>
+          <a:p/>
           <a:p>
             <a:r>
               <a:t>È il grafico probabilmente più utile da spiegare bene, perché è quello con cui un consulente PATLIB torna dal cliente.</a:t>
             </a:r>
           </a:p>
-          <a:p>
-            <a:endParaRPr/>
-          </a:p>
+          <a:p/>
           <a:p>
             <a:r>
               <a:t>Come si legge: sull'asse orizzontale c'è l'NPV in euro. Ogni riga è una delle 8 domande economiche (OEK), ordinate dalla barra più larga (in alto) alla più stretta (in basso). Per ciascuna domanda, il notebook 3 ha ricalcolato l'NPV facendo variare SOLO quella risposta da 1 a 5, tenendo tutte le altre 39 risposte ferme — quindi in totale 40 ricalcoli (8 domande × 5 possibili risposte).</a:t>
             </a:r>
           </a:p>
-          <a:p>
-            <a:endParaRPr/>
-          </a:p>
+          <a:p/>
           <a:p>
             <a:r>
               <a:t>- Barra ROSSA = quanto si perde rispetto a oggi se quella risposta fosse la peggiore possibile</a:t>
@@ -1321,25 +1465,19 @@
               <a:t>- In cima al grafico, una riga a parte, larghezza zero: "the other 32 answers – no effect whatsoever" — le 32 domande senza alcun impatto economico, mostrate qui come conferma visiva indipendente di quanto già visto nella slide 6</a:t>
             </a:r>
           </a:p>
-          <a:p>
-            <a:endParaRPr/>
-          </a:p>
+          <a:p/>
           <a:p>
             <a:r>
               <a:t>Due letture da fare ad alta voce con il pubblico, perché sono il vero contenuto "furbo" della slide:</a:t>
             </a:r>
           </a:p>
-          <a:p>
-            <a:endParaRPr/>
-          </a:p>
+          <a:p/>
           <a:p>
             <a:r>
               <a:t>1) Larghezza della barra ≠ quanto conviene lavorarci. Una domanda può avere una barra molto larga (grande differenza tra risposta peggiore e migliore) ma se la risposta ATTUALE è già la migliore possibile sulla scala, non c'è più margine di guadagno — resta solo il rischio di scendere, non la possibilità di salire. Guarda per esempio C3 (aspettativa di vita della tecnologia): è una barra ampia ma quasi tutta rossa, con pochissimo o nessun verde — significa che quella risposta è già al massimo, quindi il margine di miglioramento è nullo, mentre il rischio al ribasso resta enorme.</a:t>
             </a:r>
           </a:p>
-          <a:p>
-            <a:endParaRPr/>
-          </a:p>
+          <a:p/>
           <a:p>
             <a:r>
               <a:t>2) Questa è un'analisi "una variabile alla volta" (one-at-a-time) — le larghezze non si possono sommare per "scomporre" l'NPV in pezzi. ESEMPIO DA USARE IN PRESENTAZIONE, con dati già presenti nel grafico:</a:t>
@@ -1355,9 +1493,7 @@
               <a:t>Frase di chiusura del punto, da dire quasi alla lettera: "Il tornado dice quale leva conviene tirare per prima — non quanto varrebbe tirarle tutte insieme."</a:t>
             </a:r>
           </a:p>
-          <a:p>
-            <a:endParaRPr/>
-          </a:p>
+          <a:p/>
           <a:p>
             <a:r>
               <a:t>Cosa passa al notebook successivo (in basso): una sezione di report già pronta (ordine "700", intitolata "quale leva muove il valore?"), che il notebook 4 inserirà così com'è.</a:t>
@@ -1372,7 +1508,7 @@
             <a:spLocks noGrp="1"/>
           </p:cNvSpPr>
           <p:nvPr>
-            <p:ph type="sldNum" sz="quarter" idx="5"/>
+            <p:ph type="sldNum" idx="5" sz="quarter"/>
           </p:nvPr>
         </p:nvSpPr>
         <p:spPr/>
@@ -1386,7 +1522,7 @@
 </file>
 
 <file path=ppt/notesSlides/notesSlide8.xml><?xml version="1.0" encoding="utf-8"?>
-<p:notes xmlns:a="http://schemas.openxmlformats.org/drawingml/2006/main" xmlns:r="http://schemas.openxmlformats.org/officeDocument/2006/relationships" xmlns:p="http://schemas.openxmlformats.org/presentationml/2006/main">
+<p:notes xmlns:a="http://schemas.openxmlformats.org/drawingml/2006/main" xmlns:p="http://schemas.openxmlformats.org/presentationml/2006/main" xmlns:r="http://schemas.openxmlformats.org/officeDocument/2006/relationships">
   <p:cSld>
     <p:spTree>
       <p:nvGrpSpPr>
@@ -1406,7 +1542,7 @@
         <p:nvSpPr>
           <p:cNvPr id="2" name="Slide Image Placeholder 1"/>
           <p:cNvSpPr>
-            <a:spLocks noGrp="1" noRot="1" noChangeAspect="1"/>
+            <a:spLocks noGrp="1"/>
           </p:cNvSpPr>
           <p:nvPr>
             <p:ph type="sldImg" idx="2"/>
@@ -1421,7 +1557,7 @@
             <a:spLocks noGrp="1"/>
           </p:cNvSpPr>
           <p:nvPr>
-            <p:ph type="body" sz="quarter" idx="3"/>
+            <p:ph type="body" idx="3" sz="quarter"/>
           </p:nvPr>
         </p:nvSpPr>
         <p:spPr/>
@@ -1433,25 +1569,19 @@
               <a:t>SLIDE 8 — Come si assembla il report finale e il grafico radar</a:t>
             </a:r>
           </a:p>
-          <a:p>
-            <a:endParaRPr/>
-          </a:p>
+          <a:p/>
           <a:p>
             <a:r>
               <a:t>Prima parte della slide (a sinistra): l'elenco delle 7 sezioni che il notebook 4 costruisce SEMPRE, in un ordine fisso (a differenza del report del Modulo 6, dove i grafici potevano stare in qualsiasi ordine — qui invece una valutazione economica va letta in sequenza logica, dal verdetto ai dettagli).</a:t>
             </a:r>
           </a:p>
-          <a:p>
-            <a:endParaRPr/>
-          </a:p>
+          <a:p/>
           <a:p>
             <a:r>
               <a:t>Il grafico al centro (radar/a ragnatela) — "Section 3, for real": è il grafico del PROFILO del brevetto, non del valore economico. Ogni asse rappresenta una delle 5 sezioni del questionario (A·Legal status, B·Technology, C·Market conditions, D·Finance, E·Strategy) e mostra la percentuale di punti ottenuti rispetto al massimo possibile per quella sezione. Più l'area colorata si estende verso l'esterno su un asse, più quella dimensione del brevetto è valutata positivamente. Va usato per raccontare "dove il brevetto è forte e dove è debole" — mai per parlare di soldi, perché mescola tutte e 40 le domande (comprese le 32 che non toccano l'NPV).</a:t>
             </a:r>
           </a:p>
-          <a:p>
-            <a:endParaRPr/>
-          </a:p>
+          <a:p/>
           <a:p>
             <a:r>
               <a:t>A destra: cosa arriva dagli altri notebook, se sono stati eseguiti.</a:t>
@@ -1467,9 +1597,7 @@
               <a:t>- Dal notebook 3: la sezione aggiuntiva "700" (il grafico a tornado della slide precedente)</a:t>
             </a:r>
           </a:p>
-          <a:p>
-            <a:endParaRPr/>
-          </a:p>
+          <a:p/>
           <a:p>
             <a:r>
               <a:t>Messaggio chiave, da ripetere: se uno dei due manca, il notebook 4 funziona comunque e lo dichiara esplicitamente (es. "0 measured") — non c'è mai un report a metà o silenzioso su cosa manca.</a:t>
@@ -1484,7 +1612,7 @@
             <a:spLocks noGrp="1"/>
           </p:cNvSpPr>
           <p:nvPr>
-            <p:ph type="sldNum" sz="quarter" idx="5"/>
+            <p:ph type="sldNum" idx="5" sz="quarter"/>
           </p:nvPr>
         </p:nvSpPr>
         <p:spPr/>
@@ -1498,7 +1626,7 @@
 </file>
 
 <file path=ppt/notesSlides/notesSlide9.xml><?xml version="1.0" encoding="utf-8"?>
-<p:notes xmlns:a="http://schemas.openxmlformats.org/drawingml/2006/main" xmlns:r="http://schemas.openxmlformats.org/officeDocument/2006/relationships" xmlns:p="http://schemas.openxmlformats.org/presentationml/2006/main">
+<p:notes xmlns:a="http://schemas.openxmlformats.org/drawingml/2006/main" xmlns:p="http://schemas.openxmlformats.org/presentationml/2006/main" xmlns:r="http://schemas.openxmlformats.org/officeDocument/2006/relationships">
   <p:cSld>
     <p:spTree>
       <p:nvGrpSpPr>
@@ -1518,7 +1646,7 @@
         <p:nvSpPr>
           <p:cNvPr id="2" name="Slide Image Placeholder 1"/>
           <p:cNvSpPr>
-            <a:spLocks noGrp="1" noRot="1" noChangeAspect="1"/>
+            <a:spLocks noGrp="1"/>
           </p:cNvSpPr>
           <p:nvPr>
             <p:ph type="sldImg" idx="2"/>
@@ -1533,7 +1661,7 @@
             <a:spLocks noGrp="1"/>
           </p:cNvSpPr>
           <p:nvPr>
-            <p:ph type="body" sz="quarter" idx="3"/>
+            <p:ph type="body" idx="3" sz="quarter"/>
           </p:nvPr>
         </p:nvSpPr>
         <p:spPr/>
@@ -1545,17 +1673,13 @@
               <a:t>SLIDE 9 — Come i file passano da un notebook all'altro</a:t>
             </a:r>
           </a:p>
-          <a:p>
-            <a:endParaRPr/>
-          </a:p>
+          <a:p/>
           <a:p>
             <a:r>
               <a:t>Questa slide è più tecnica ma utile se il pubblico chiede "ma come fanno davvero a comunicare tra loro questi notebook?" — è una mappa dei file, non dei concetti.</a:t>
             </a:r>
           </a:p>
-          <a:p>
-            <a:endParaRPr/>
-          </a:p>
+          <a:p/>
           <a:p>
             <a:r>
               <a:t>In alto: i due file che TUTTI e 4 i notebook leggono come base comune (fonte unica di verità):</a:t>
@@ -1571,9 +1695,7 @@
               <a:t>- ipscore_spec.json: le 40 domande ufficiali dell'EPO e le 8 tabelle di conversione (quelle che trasformano una risposta 1-5 in una quantità economica)</a:t>
             </a:r>
           </a:p>
-          <a:p>
-            <a:endParaRPr/>
-          </a:p>
+          <a:p/>
           <a:p>
             <a:r>
               <a:t>Poi i 4 notebook in sequenza, ciascuno con quello che PRODUCE (non quello che fa internamente):</a:t>
@@ -1599,17 +1721,13 @@
               <a:t>4 → legge tutto quello che è disponibile sopra</a:t>
             </a:r>
           </a:p>
-          <a:p>
-            <a:endParaRPr/>
-          </a:p>
+          <a:p/>
           <a:p>
             <a:r>
               <a:t>In basso: l'output finale, i due file che poi si aprono con open_html() dentro TIP (mai con IFrame, come avevamo già chiarito).</a:t>
             </a:r>
           </a:p>
-          <a:p>
-            <a:endParaRPr/>
-          </a:p>
+          <a:p/>
           <a:p>
             <a:r>
               <a:t>Frase da riprendere alla lettera, è il punto tecnico più interessante di questa slide: le frecce vanno SOLO in un verso. Il notebook 3 non tocca mai il file scritto dal notebook 2, e il notebook 4 non modifica MAI nessuno dei file che legge — li legge soltanto. È un flusso a senso unico, che rende ogni notebook eseguibile in isolamento senza il rischio che uno rovini il lavoro di un altro.</a:t>
@@ -1624,7 +1742,7 @@
             <a:spLocks noGrp="1"/>
           </p:cNvSpPr>
           <p:nvPr>
-            <p:ph type="sldNum" sz="quarter" idx="5"/>
+            <p:ph type="sldNum" idx="5" sz="quarter"/>
           </p:nvPr>
         </p:nvSpPr>
         <p:spPr/>
@@ -1816,7 +1934,7 @@
           <a:p>
             <a:fld id="{5BCAD085-E8A6-8845-BD4E-CB4CCA059FC4}" type="datetimeFigureOut">
               <a:rPr lang="en-US" smtClean="0"/>
-              <a:t>8/26/26</a:t>
+              <a:t>8/19/2026</a:t>
             </a:fld>
             <a:endParaRPr lang="en-US"/>
           </a:p>
@@ -1858,7 +1976,7 @@
           <a:p>
             <a:fld id="{C1FF6DA9-008F-8B48-92A6-B652298478BF}" type="slidenum">
               <a:rPr lang="en-US" smtClean="0"/>
-              <a:t>‹#›</a:t>
+              <a:t>‹N›</a:t>
             </a:fld>
             <a:endParaRPr lang="en-US"/>
           </a:p>
@@ -1984,7 +2102,7 @@
           <a:p>
             <a:fld id="{5BCAD085-E8A6-8845-BD4E-CB4CCA059FC4}" type="datetimeFigureOut">
               <a:rPr lang="en-US" smtClean="0"/>
-              <a:t>8/26/26</a:t>
+              <a:t>8/19/2026</a:t>
             </a:fld>
             <a:endParaRPr lang="en-US"/>
           </a:p>
@@ -2026,7 +2144,7 @@
           <a:p>
             <a:fld id="{C1FF6DA9-008F-8B48-92A6-B652298478BF}" type="slidenum">
               <a:rPr lang="en-US" smtClean="0"/>
-              <a:t>‹#›</a:t>
+              <a:t>‹N›</a:t>
             </a:fld>
             <a:endParaRPr lang="en-US"/>
           </a:p>
@@ -2162,7 +2280,7 @@
           <a:p>
             <a:fld id="{5BCAD085-E8A6-8845-BD4E-CB4CCA059FC4}" type="datetimeFigureOut">
               <a:rPr lang="en-US" smtClean="0"/>
-              <a:t>8/26/26</a:t>
+              <a:t>8/19/2026</a:t>
             </a:fld>
             <a:endParaRPr lang="en-US"/>
           </a:p>
@@ -2204,7 +2322,7 @@
           <a:p>
             <a:fld id="{C1FF6DA9-008F-8B48-92A6-B652298478BF}" type="slidenum">
               <a:rPr lang="en-US" smtClean="0"/>
-              <a:t>‹#›</a:t>
+              <a:t>‹N›</a:t>
             </a:fld>
             <a:endParaRPr lang="en-US"/>
           </a:p>
@@ -2330,7 +2448,7 @@
           <a:p>
             <a:fld id="{5BCAD085-E8A6-8845-BD4E-CB4CCA059FC4}" type="datetimeFigureOut">
               <a:rPr lang="en-US" smtClean="0"/>
-              <a:t>8/26/26</a:t>
+              <a:t>8/19/2026</a:t>
             </a:fld>
             <a:endParaRPr lang="en-US"/>
           </a:p>
@@ -2372,7 +2490,7 @@
           <a:p>
             <a:fld id="{C1FF6DA9-008F-8B48-92A6-B652298478BF}" type="slidenum">
               <a:rPr lang="en-US" smtClean="0"/>
-              <a:t>‹#›</a:t>
+              <a:t>‹N›</a:t>
             </a:fld>
             <a:endParaRPr lang="en-US"/>
           </a:p>
@@ -2575,7 +2693,7 @@
           <a:p>
             <a:fld id="{5BCAD085-E8A6-8845-BD4E-CB4CCA059FC4}" type="datetimeFigureOut">
               <a:rPr lang="en-US" smtClean="0"/>
-              <a:t>8/26/26</a:t>
+              <a:t>8/19/2026</a:t>
             </a:fld>
             <a:endParaRPr lang="en-US"/>
           </a:p>
@@ -2617,7 +2735,7 @@
           <a:p>
             <a:fld id="{C1FF6DA9-008F-8B48-92A6-B652298478BF}" type="slidenum">
               <a:rPr lang="en-US" smtClean="0"/>
-              <a:t>‹#›</a:t>
+              <a:t>‹N›</a:t>
             </a:fld>
             <a:endParaRPr lang="en-US"/>
           </a:p>
@@ -2860,7 +2978,7 @@
           <a:p>
             <a:fld id="{5BCAD085-E8A6-8845-BD4E-CB4CCA059FC4}" type="datetimeFigureOut">
               <a:rPr lang="en-US" smtClean="0"/>
-              <a:t>8/26/26</a:t>
+              <a:t>8/19/2026</a:t>
             </a:fld>
             <a:endParaRPr lang="en-US"/>
           </a:p>
@@ -2902,7 +3020,7 @@
           <a:p>
             <a:fld id="{C1FF6DA9-008F-8B48-92A6-B652298478BF}" type="slidenum">
               <a:rPr lang="en-US" smtClean="0"/>
-              <a:t>‹#›</a:t>
+              <a:t>‹N›</a:t>
             </a:fld>
             <a:endParaRPr lang="en-US"/>
           </a:p>
@@ -3279,7 +3397,7 @@
           <a:p>
             <a:fld id="{5BCAD085-E8A6-8845-BD4E-CB4CCA059FC4}" type="datetimeFigureOut">
               <a:rPr lang="en-US" smtClean="0"/>
-              <a:t>8/26/26</a:t>
+              <a:t>8/19/2026</a:t>
             </a:fld>
             <a:endParaRPr lang="en-US"/>
           </a:p>
@@ -3321,7 +3439,7 @@
           <a:p>
             <a:fld id="{C1FF6DA9-008F-8B48-92A6-B652298478BF}" type="slidenum">
               <a:rPr lang="en-US" smtClean="0"/>
-              <a:t>‹#›</a:t>
+              <a:t>‹N›</a:t>
             </a:fld>
             <a:endParaRPr lang="en-US"/>
           </a:p>
@@ -3396,7 +3514,7 @@
           <a:p>
             <a:fld id="{5BCAD085-E8A6-8845-BD4E-CB4CCA059FC4}" type="datetimeFigureOut">
               <a:rPr lang="en-US" smtClean="0"/>
-              <a:t>8/26/26</a:t>
+              <a:t>8/19/2026</a:t>
             </a:fld>
             <a:endParaRPr lang="en-US"/>
           </a:p>
@@ -3438,7 +3556,7 @@
           <a:p>
             <a:fld id="{C1FF6DA9-008F-8B48-92A6-B652298478BF}" type="slidenum">
               <a:rPr lang="en-US" smtClean="0"/>
-              <a:t>‹#›</a:t>
+              <a:t>‹N›</a:t>
             </a:fld>
             <a:endParaRPr lang="en-US"/>
           </a:p>
@@ -3491,7 +3609,7 @@
           <a:p>
             <a:fld id="{5BCAD085-E8A6-8845-BD4E-CB4CCA059FC4}" type="datetimeFigureOut">
               <a:rPr lang="en-US" smtClean="0"/>
-              <a:t>8/26/26</a:t>
+              <a:t>8/19/2026</a:t>
             </a:fld>
             <a:endParaRPr lang="en-US"/>
           </a:p>
@@ -3533,7 +3651,7 @@
           <a:p>
             <a:fld id="{C1FF6DA9-008F-8B48-92A6-B652298478BF}" type="slidenum">
               <a:rPr lang="en-US" smtClean="0"/>
-              <a:t>‹#›</a:t>
+              <a:t>‹N›</a:t>
             </a:fld>
             <a:endParaRPr lang="en-US"/>
           </a:p>
@@ -3766,7 +3884,7 @@
           <a:p>
             <a:fld id="{5BCAD085-E8A6-8845-BD4E-CB4CCA059FC4}" type="datetimeFigureOut">
               <a:rPr lang="en-US" smtClean="0"/>
-              <a:t>8/26/26</a:t>
+              <a:t>8/19/2026</a:t>
             </a:fld>
             <a:endParaRPr lang="en-US"/>
           </a:p>
@@ -3808,7 +3926,7 @@
           <a:p>
             <a:fld id="{C1FF6DA9-008F-8B48-92A6-B652298478BF}" type="slidenum">
               <a:rPr lang="en-US" smtClean="0"/>
-              <a:t>‹#›</a:t>
+              <a:t>‹N›</a:t>
             </a:fld>
             <a:endParaRPr lang="en-US"/>
           </a:p>
@@ -4018,7 +4136,7 @@
           <a:p>
             <a:fld id="{5BCAD085-E8A6-8845-BD4E-CB4CCA059FC4}" type="datetimeFigureOut">
               <a:rPr lang="en-US" smtClean="0"/>
-              <a:t>8/26/26</a:t>
+              <a:t>8/19/2026</a:t>
             </a:fld>
             <a:endParaRPr lang="en-US"/>
           </a:p>
@@ -4060,7 +4178,7 @@
           <a:p>
             <a:fld id="{C1FF6DA9-008F-8B48-92A6-B652298478BF}" type="slidenum">
               <a:rPr lang="en-US" smtClean="0"/>
-              <a:t>‹#›</a:t>
+              <a:t>‹N›</a:t>
             </a:fld>
             <a:endParaRPr lang="en-US"/>
           </a:p>
@@ -4229,7 +4347,7 @@
           <a:p>
             <a:fld id="{5BCAD085-E8A6-8845-BD4E-CB4CCA059FC4}" type="datetimeFigureOut">
               <a:rPr lang="en-US" smtClean="0"/>
-              <a:t>8/26/26</a:t>
+              <a:t>8/19/2026</a:t>
             </a:fld>
             <a:endParaRPr lang="en-US"/>
           </a:p>
@@ -4307,7 +4425,7 @@
           <a:p>
             <a:fld id="{C1FF6DA9-008F-8B48-92A6-B652298478BF}" type="slidenum">
               <a:rPr lang="en-US" smtClean="0"/>
-              <a:t>‹#›</a:t>
+              <a:t>‹N›</a:t>
             </a:fld>
             <a:endParaRPr lang="en-US"/>
           </a:p>
@@ -6054,7 +6172,7 @@
         <p:spPr>
           <a:xfrm>
             <a:off x="1069848" y="1920240"/>
-            <a:ext cx="10344607" cy="277512"/>
+            <a:ext cx="10344607" cy="548640"/>
           </a:xfrm>
           <a:prstGeom prst="rect">
             <a:avLst/>
@@ -6076,49 +6194,13 @@
               </a:spcAft>
             </a:pPr>
             <a:r>
-              <a:rPr sz="1600" b="0" i="0" dirty="0">
+              <a:rPr sz="1600" b="0" i="0">
                 <a:solidFill>
                   <a:srgbClr val="1A1A1A"/>
                 </a:solidFill>
                 <a:latin typeface="Arial"/>
               </a:rPr>
-              <a:t>Full chain: </a:t>
-            </a:r>
-            <a:r>
-              <a:rPr lang="de-DE" sz="1600" dirty="0">
-                <a:solidFill>
-                  <a:srgbClr val="1A1A1A"/>
-                </a:solidFill>
-                <a:latin typeface="Arial"/>
-              </a:rPr>
-              <a:t>6</a:t>
-            </a:r>
-            <a:r>
-              <a:rPr sz="1600" b="0" i="0" dirty="0">
-                <a:solidFill>
-                  <a:srgbClr val="1A1A1A"/>
-                </a:solidFill>
-                <a:latin typeface="Arial"/>
-              </a:rPr>
-              <a:t>_</a:t>
-            </a:r>
-            <a:r>
-              <a:rPr sz="1600" b="0" i="0" dirty="0" err="1">
-                <a:solidFill>
-                  <a:srgbClr val="1A1A1A"/>
-                </a:solidFill>
-                <a:latin typeface="Arial"/>
-              </a:rPr>
-              <a:t>ipscore_rebuild</a:t>
-            </a:r>
-            <a:r>
-              <a:rPr sz="1600" b="0" i="0" dirty="0">
-                <a:solidFill>
-                  <a:srgbClr val="1A1A1A"/>
-                </a:solidFill>
-                <a:latin typeface="Arial"/>
-              </a:rPr>
-              <a:t>/ (notebooks 1–4), run order 1 → 2 → 3 → 4</a:t>
+              <a:t>Full chain: 8_ipscore_rebuild/ (notebooks 1–4), run order 1 → 2 → 3 → 4</a:t>
             </a:r>
           </a:p>
         </p:txBody>
@@ -6264,7 +6346,7 @@
         <p:spPr>
           <a:xfrm>
             <a:off x="1069848" y="3236976"/>
-            <a:ext cx="10344607" cy="277512"/>
+            <a:ext cx="10344607" cy="548640"/>
           </a:xfrm>
           <a:prstGeom prst="rect">
             <a:avLst/>
@@ -6286,40 +6368,13 @@
               </a:spcAft>
             </a:pPr>
             <a:r>
-              <a:rPr sz="1600" b="0" i="0" dirty="0">
+              <a:rPr sz="1600" b="0" i="0">
                 <a:solidFill>
                   <a:srgbClr val="1A1A1A"/>
                 </a:solidFill>
                 <a:latin typeface="Arial"/>
               </a:rPr>
-              <a:t>Workshop-ready original: </a:t>
-            </a:r>
-            <a:r>
-              <a:rPr lang="de-DE" sz="1600" dirty="0">
-                <a:solidFill>
-                  <a:srgbClr val="1A1A1A"/>
-                </a:solidFill>
-                <a:latin typeface="Arial"/>
-              </a:rPr>
-              <a:t>9_documentation/</a:t>
-            </a:r>
-            <a:r>
-              <a:rPr sz="1600" b="0" i="0" dirty="0" err="1">
-                <a:solidFill>
-                  <a:srgbClr val="1A1A1A"/>
-                </a:solidFill>
-                <a:latin typeface="Arial"/>
-              </a:rPr>
-              <a:t>ipscore</a:t>
-            </a:r>
-            <a:r>
-              <a:rPr sz="1600" b="0" i="0" dirty="0">
-                <a:solidFill>
-                  <a:srgbClr val="1A1A1A"/>
-                </a:solidFill>
-                <a:latin typeface="Arial"/>
-              </a:rPr>
-              <a:t>/ — stays untouched as the working reference</a:t>
+              <a:t>Workshop-ready original: 7_ipscore/ — stays untouched as the working reference</a:t>
             </a:r>
           </a:p>
         </p:txBody>
@@ -8850,7 +8905,7 @@
           <p:nvPr/>
         </p:nvPicPr>
         <p:blipFill>
-          <a:blip r:embed="rId3"/>
+          <a:blip r:embed="rId2"/>
           <a:stretch>
             <a:fillRect/>
           </a:stretch>
@@ -9480,7 +9535,7 @@
           <p:nvPr/>
         </p:nvPicPr>
         <p:blipFill>
-          <a:blip r:embed="rId3"/>
+          <a:blip r:embed="rId2"/>
           <a:stretch>
             <a:fillRect/>
           </a:stretch>
@@ -10016,7 +10071,7 @@
           <p:nvPr/>
         </p:nvPicPr>
         <p:blipFill>
-          <a:blip r:embed="rId3"/>
+          <a:blip r:embed="rId2"/>
           <a:stretch>
             <a:fillRect/>
           </a:stretch>
@@ -10616,7 +10671,7 @@
           <p:nvPr/>
         </p:nvPicPr>
         <p:blipFill>
-          <a:blip r:embed="rId3"/>
+          <a:blip r:embed="rId2"/>
           <a:stretch>
             <a:fillRect/>
           </a:stretch>
@@ -11911,7 +11966,7 @@
           <p:nvPr/>
         </p:nvPicPr>
         <p:blipFill>
-          <a:blip r:embed="rId3"/>
+          <a:blip r:embed="rId2"/>
           <a:stretch>
             <a:fillRect/>
           </a:stretch>
@@ -13767,44 +13822,44 @@
         <a:sysClr val="window" lastClr="FFFFFF"/>
       </a:lt1>
       <a:dk2>
-        <a:srgbClr val="0E2841"/>
+        <a:srgbClr val="1F497D"/>
       </a:dk2>
       <a:lt2>
-        <a:srgbClr val="E8E8E8"/>
+        <a:srgbClr val="EEECE1"/>
       </a:lt2>
       <a:accent1>
-        <a:srgbClr val="156082"/>
+        <a:srgbClr val="4F81BD"/>
       </a:accent1>
       <a:accent2>
-        <a:srgbClr val="E97132"/>
+        <a:srgbClr val="C0504D"/>
       </a:accent2>
       <a:accent3>
-        <a:srgbClr val="196B24"/>
+        <a:srgbClr val="9BBB59"/>
       </a:accent3>
       <a:accent4>
-        <a:srgbClr val="0F9ED5"/>
+        <a:srgbClr val="8064A2"/>
       </a:accent4>
       <a:accent5>
-        <a:srgbClr val="A02B93"/>
+        <a:srgbClr val="4BACC6"/>
       </a:accent5>
       <a:accent6>
-        <a:srgbClr val="4EA72E"/>
+        <a:srgbClr val="F79646"/>
       </a:accent6>
       <a:hlink>
-        <a:srgbClr val="467886"/>
+        <a:srgbClr val="0000FF"/>
       </a:hlink>
       <a:folHlink>
-        <a:srgbClr val="96607D"/>
+        <a:srgbClr val="800080"/>
       </a:folHlink>
     </a:clrScheme>
     <a:fontScheme name="Office">
       <a:majorFont>
-        <a:latin typeface="Aptos Display" panose="02110004020202020204"/>
+        <a:latin typeface="Calibri"/>
         <a:ea typeface=""/>
         <a:cs typeface=""/>
-        <a:font script="Jpan" typeface="游ゴシック Light"/>
+        <a:font script="Jpan" typeface="ＭＳ Ｐゴシック"/>
         <a:font script="Hang" typeface="맑은 고딕"/>
-        <a:font script="Hans" typeface="等线 Light"/>
+        <a:font script="Hans" typeface="宋体"/>
         <a:font script="Hant" typeface="新細明體"/>
         <a:font script="Arab" typeface="Times New Roman"/>
         <a:font script="Hebr" typeface="Times New Roman"/>
@@ -13832,31 +13887,14 @@
         <a:font script="Viet" typeface="Times New Roman"/>
         <a:font script="Uigh" typeface="Microsoft Uighur"/>
         <a:font script="Geor" typeface="Sylfaen"/>
-        <a:font script="Armn" typeface="Arial"/>
-        <a:font script="Bugi" typeface="Leelawadee UI"/>
-        <a:font script="Bopo" typeface="Microsoft JhengHei"/>
-        <a:font script="Java" typeface="Javanese Text"/>
-        <a:font script="Lisu" typeface="Segoe UI"/>
-        <a:font script="Mymr" typeface="Myanmar Text"/>
-        <a:font script="Nkoo" typeface="Ebrima"/>
-        <a:font script="Olck" typeface="Nirmala UI"/>
-        <a:font script="Osma" typeface="Ebrima"/>
-        <a:font script="Phag" typeface="Phagspa"/>
-        <a:font script="Syrn" typeface="Estrangelo Edessa"/>
-        <a:font script="Syrj" typeface="Estrangelo Edessa"/>
-        <a:font script="Syre" typeface="Estrangelo Edessa"/>
-        <a:font script="Sora" typeface="Nirmala UI"/>
-        <a:font script="Tale" typeface="Microsoft Tai Le"/>
-        <a:font script="Talu" typeface="Microsoft New Tai Lue"/>
-        <a:font script="Tfng" typeface="Ebrima"/>
       </a:majorFont>
       <a:minorFont>
-        <a:latin typeface="Aptos" panose="02110004020202020204"/>
+        <a:latin typeface="Calibri"/>
         <a:ea typeface=""/>
         <a:cs typeface=""/>
-        <a:font script="Jpan" typeface="游ゴシック"/>
+        <a:font script="Jpan" typeface="ＭＳ Ｐゴシック"/>
         <a:font script="Hang" typeface="맑은 고딕"/>
-        <a:font script="Hans" typeface="等线"/>
+        <a:font script="Hans" typeface="宋体"/>
         <a:font script="Hant" typeface="新細明體"/>
         <a:font script="Arab" typeface="Arial"/>
         <a:font script="Hebr" typeface="Arial"/>
@@ -13884,23 +13922,6 @@
         <a:font script="Viet" typeface="Arial"/>
         <a:font script="Uigh" typeface="Microsoft Uighur"/>
         <a:font script="Geor" typeface="Sylfaen"/>
-        <a:font script="Armn" typeface="Arial"/>
-        <a:font script="Bugi" typeface="Leelawadee UI"/>
-        <a:font script="Bopo" typeface="Microsoft JhengHei"/>
-        <a:font script="Java" typeface="Javanese Text"/>
-        <a:font script="Lisu" typeface="Segoe UI"/>
-        <a:font script="Mymr" typeface="Myanmar Text"/>
-        <a:font script="Nkoo" typeface="Ebrima"/>
-        <a:font script="Olck" typeface="Nirmala UI"/>
-        <a:font script="Osma" typeface="Ebrima"/>
-        <a:font script="Phag" typeface="Phagspa"/>
-        <a:font script="Syrn" typeface="Estrangelo Edessa"/>
-        <a:font script="Syrj" typeface="Estrangelo Edessa"/>
-        <a:font script="Syre" typeface="Estrangelo Edessa"/>
-        <a:font script="Sora" typeface="Nirmala UI"/>
-        <a:font script="Tale" typeface="Microsoft Tai Le"/>
-        <a:font script="Talu" typeface="Microsoft New Tai Lue"/>
-        <a:font script="Tfng" typeface="Ebrima"/>
       </a:minorFont>
     </a:fontScheme>
     <a:fmtScheme name="Office">
@@ -13912,136 +13933,180 @@
           <a:gsLst>
             <a:gs pos="0">
               <a:schemeClr val="phClr">
-                <a:lumMod val="110000"/>
-                <a:satMod val="105000"/>
-                <a:tint val="67000"/>
+                <a:tint val="50000"/>
+                <a:satMod val="300000"/>
               </a:schemeClr>
             </a:gs>
-            <a:gs pos="50000">
+            <a:gs pos="35000">
               <a:schemeClr val="phClr">
-                <a:lumMod val="105000"/>
-                <a:satMod val="103000"/>
-                <a:tint val="73000"/>
+                <a:tint val="37000"/>
+                <a:satMod val="300000"/>
               </a:schemeClr>
             </a:gs>
             <a:gs pos="100000">
               <a:schemeClr val="phClr">
-                <a:lumMod val="105000"/>
-                <a:satMod val="109000"/>
-                <a:tint val="81000"/>
+                <a:tint val="15000"/>
+                <a:satMod val="350000"/>
               </a:schemeClr>
             </a:gs>
           </a:gsLst>
-          <a:lin ang="5400000" scaled="0"/>
+          <a:lin ang="16200000" scaled="1"/>
         </a:gradFill>
         <a:gradFill rotWithShape="1">
           <a:gsLst>
             <a:gs pos="0">
               <a:schemeClr val="phClr">
-                <a:satMod val="103000"/>
-                <a:lumMod val="102000"/>
-                <a:tint val="94000"/>
-              </a:schemeClr>
-            </a:gs>
-            <a:gs pos="50000">
-              <a:schemeClr val="phClr">
-                <a:satMod val="110000"/>
-                <a:lumMod val="100000"/>
+                <a:tint val="100000"/>
                 <a:shade val="100000"/>
+                <a:satMod val="130000"/>
               </a:schemeClr>
             </a:gs>
             <a:gs pos="100000">
               <a:schemeClr val="phClr">
-                <a:lumMod val="99000"/>
-                <a:satMod val="120000"/>
-                <a:shade val="78000"/>
+                <a:tint val="50000"/>
+                <a:shade val="100000"/>
+                <a:satMod val="350000"/>
               </a:schemeClr>
             </a:gs>
           </a:gsLst>
-          <a:lin ang="5400000" scaled="0"/>
+          <a:lin ang="16200000" scaled="0"/>
         </a:gradFill>
       </a:fillStyleLst>
       <a:lnStyleLst>
-        <a:ln w="12700" cap="flat" cmpd="sng" algn="ctr">
+        <a:ln w="9525" cap="flat" cmpd="sng" algn="ctr">
           <a:solidFill>
-            <a:schemeClr val="phClr"/>
+            <a:schemeClr val="phClr">
+              <a:shade val="95000"/>
+              <a:satMod val="105000"/>
+            </a:schemeClr>
           </a:solidFill>
           <a:prstDash val="solid"/>
-          <a:miter lim="800000"/>
-        </a:ln>
-        <a:ln w="19050" cap="flat" cmpd="sng" algn="ctr">
-          <a:solidFill>
-            <a:schemeClr val="phClr"/>
-          </a:solidFill>
-          <a:prstDash val="solid"/>
-          <a:miter lim="800000"/>
         </a:ln>
         <a:ln w="25400" cap="flat" cmpd="sng" algn="ctr">
           <a:solidFill>
             <a:schemeClr val="phClr"/>
           </a:solidFill>
           <a:prstDash val="solid"/>
-          <a:miter lim="800000"/>
+        </a:ln>
+        <a:ln w="38100" cap="flat" cmpd="sng" algn="ctr">
+          <a:solidFill>
+            <a:schemeClr val="phClr"/>
+          </a:solidFill>
+          <a:prstDash val="solid"/>
         </a:ln>
       </a:lnStyleLst>
       <a:effectStyleLst>
         <a:effectStyle>
-          <a:effectLst/>
-        </a:effectStyle>
-        <a:effectStyle>
-          <a:effectLst/>
+          <a:effectLst>
+            <a:outerShdw blurRad="40000" dist="20000" dir="5400000" rotWithShape="0">
+              <a:srgbClr val="000000">
+                <a:alpha val="38000"/>
+              </a:srgbClr>
+            </a:outerShdw>
+          </a:effectLst>
         </a:effectStyle>
         <a:effectStyle>
           <a:effectLst>
-            <a:outerShdw blurRad="57150" dist="19050" dir="5400000" algn="ctr" rotWithShape="0">
+            <a:outerShdw blurRad="40000" dist="23000" dir="5400000" rotWithShape="0">
               <a:srgbClr val="000000">
-                <a:alpha val="63000"/>
+                <a:alpha val="35000"/>
               </a:srgbClr>
             </a:outerShdw>
           </a:effectLst>
+        </a:effectStyle>
+        <a:effectStyle>
+          <a:effectLst>
+            <a:outerShdw blurRad="40000" dist="23000" dir="5400000" rotWithShape="0">
+              <a:srgbClr val="000000">
+                <a:alpha val="35000"/>
+              </a:srgbClr>
+            </a:outerShdw>
+          </a:effectLst>
+          <a:scene3d>
+            <a:camera prst="orthographicFront">
+              <a:rot lat="0" lon="0" rev="0"/>
+            </a:camera>
+            <a:lightRig rig="threePt" dir="t">
+              <a:rot lat="0" lon="0" rev="1200000"/>
+            </a:lightRig>
+          </a:scene3d>
+          <a:sp3d>
+            <a:bevelT w="63500" h="25400"/>
+          </a:sp3d>
         </a:effectStyle>
       </a:effectStyleLst>
       <a:bgFillStyleLst>
         <a:solidFill>
           <a:schemeClr val="phClr"/>
         </a:solidFill>
-        <a:solidFill>
-          <a:schemeClr val="phClr">
-            <a:tint val="95000"/>
-            <a:satMod val="170000"/>
-          </a:schemeClr>
-        </a:solidFill>
         <a:gradFill rotWithShape="1">
           <a:gsLst>
             <a:gs pos="0">
               <a:schemeClr val="phClr">
-                <a:tint val="93000"/>
-                <a:satMod val="150000"/>
-                <a:shade val="98000"/>
-                <a:lumMod val="102000"/>
+                <a:tint val="40000"/>
+                <a:satMod val="350000"/>
               </a:schemeClr>
             </a:gs>
-            <a:gs pos="50000">
+            <a:gs pos="40000">
               <a:schemeClr val="phClr">
-                <a:tint val="98000"/>
-                <a:satMod val="130000"/>
-                <a:shade val="90000"/>
-                <a:lumMod val="103000"/>
+                <a:tint val="45000"/>
+                <a:shade val="99000"/>
+                <a:satMod val="350000"/>
               </a:schemeClr>
             </a:gs>
             <a:gs pos="100000">
               <a:schemeClr val="phClr">
-                <a:shade val="63000"/>
-                <a:satMod val="120000"/>
+                <a:shade val="20000"/>
+                <a:satMod val="255000"/>
               </a:schemeClr>
             </a:gs>
           </a:gsLst>
-          <a:lin ang="5400000" scaled="0"/>
+          <a:path path="circle">
+            <a:fillToRect l="50000" t="-80000" r="50000" b="180000"/>
+          </a:path>
+        </a:gradFill>
+        <a:gradFill rotWithShape="1">
+          <a:gsLst>
+            <a:gs pos="0">
+              <a:schemeClr val="phClr">
+                <a:tint val="80000"/>
+                <a:satMod val="300000"/>
+              </a:schemeClr>
+            </a:gs>
+            <a:gs pos="100000">
+              <a:schemeClr val="phClr">
+                <a:shade val="30000"/>
+                <a:satMod val="200000"/>
+              </a:schemeClr>
+            </a:gs>
+          </a:gsLst>
+          <a:path path="circle">
+            <a:fillToRect l="50000" t="50000" r="50000" b="50000"/>
+          </a:path>
         </a:gradFill>
       </a:bgFillStyleLst>
     </a:fmtScheme>
   </a:themeElements>
   <a:objectDefaults>
+    <a:spDef>
+      <a:spPr/>
+      <a:bodyPr/>
+      <a:lstStyle/>
+      <a:style>
+        <a:lnRef idx="1">
+          <a:schemeClr val="accent1"/>
+        </a:lnRef>
+        <a:fillRef idx="3">
+          <a:schemeClr val="accent1"/>
+        </a:fillRef>
+        <a:effectRef idx="2">
+          <a:schemeClr val="accent1"/>
+        </a:effectRef>
+        <a:fontRef idx="minor">
+          <a:schemeClr val="lt1"/>
+        </a:fontRef>
+      </a:style>
+    </a:spDef>
     <a:lnDef>
       <a:spPr/>
       <a:bodyPr/>
@@ -14063,10 +14128,5 @@
     </a:lnDef>
   </a:objectDefaults>
   <a:extraClrSchemeLst/>
-  <a:extLst>
-    <a:ext uri="{05A4C25C-085E-4340-85A3-A5531E510DB2}">
-      <thm15:themeFamily xmlns:thm15="http://schemas.microsoft.com/office/thememl/2012/main" name="Office Theme" id="{2E142A2C-CD16-42D6-873A-C26D2A0506FA}" vid="{1BDDFF52-6CD6-40A5-AB3C-68EB2F1E4D0A}"/>
-    </a:ext>
-  </a:extLst>
 </a:theme>
 </file>